--- a/Smart-Billing-and-Customer-Services-At-Store.pptx.pptx
+++ b/Smart-Billing-and-Customer-Services-At-Store.pptx.pptx
@@ -234,7 +234,7 @@
           <a:p>
             <a:fld id="{B7268E1E-0E44-426D-905E-8AD9B19D2182}" type="datetimeFigureOut">
               <a:rPr lang="cs-CZ" smtClean="0"/>
-              <a:t>15.02.2025</a:t>
+              <a:t>23.02.2025</a:t>
             </a:fld>
             <a:endParaRPr lang="cs-CZ"/>
           </a:p>
@@ -2738,7 +2738,7 @@
             <a:fld id="{1D8BD707-D9CF-40AE-B4C6-C98DA3205C09}" type="datetimeFigureOut">
               <a:rPr lang="en-US" smtClean="0"/>
               <a:pPr/>
-              <a:t>2/15/25</a:t>
+              <a:t>2/23/25</a:t>
             </a:fld>
             <a:endParaRPr lang="en-US"/>
           </a:p>
@@ -2903,7 +2903,7 @@
             <a:fld id="{1D8BD707-D9CF-40AE-B4C6-C98DA3205C09}" type="datetimeFigureOut">
               <a:rPr lang="en-US" smtClean="0"/>
               <a:pPr/>
-              <a:t>2/15/25</a:t>
+              <a:t>2/23/25</a:t>
             </a:fld>
             <a:endParaRPr lang="en-US"/>
           </a:p>
@@ -3078,7 +3078,7 @@
             <a:fld id="{1D8BD707-D9CF-40AE-B4C6-C98DA3205C09}" type="datetimeFigureOut">
               <a:rPr lang="en-US" smtClean="0"/>
               <a:pPr/>
-              <a:t>2/15/25</a:t>
+              <a:t>2/23/25</a:t>
             </a:fld>
             <a:endParaRPr lang="en-US"/>
           </a:p>
@@ -3243,7 +3243,7 @@
             <a:fld id="{1D8BD707-D9CF-40AE-B4C6-C98DA3205C09}" type="datetimeFigureOut">
               <a:rPr lang="en-US" smtClean="0"/>
               <a:pPr/>
-              <a:t>2/15/25</a:t>
+              <a:t>2/23/25</a:t>
             </a:fld>
             <a:endParaRPr lang="en-US"/>
           </a:p>
@@ -3485,7 +3485,7 @@
             <a:fld id="{1D8BD707-D9CF-40AE-B4C6-C98DA3205C09}" type="datetimeFigureOut">
               <a:rPr lang="en-US" smtClean="0"/>
               <a:pPr/>
-              <a:t>2/15/25</a:t>
+              <a:t>2/23/25</a:t>
             </a:fld>
             <a:endParaRPr lang="en-US"/>
           </a:p>
@@ -3767,7 +3767,7 @@
             <a:fld id="{1D8BD707-D9CF-40AE-B4C6-C98DA3205C09}" type="datetimeFigureOut">
               <a:rPr lang="en-US" smtClean="0"/>
               <a:pPr/>
-              <a:t>2/15/25</a:t>
+              <a:t>2/23/25</a:t>
             </a:fld>
             <a:endParaRPr lang="en-US"/>
           </a:p>
@@ -4183,7 +4183,7 @@
             <a:fld id="{1D8BD707-D9CF-40AE-B4C6-C98DA3205C09}" type="datetimeFigureOut">
               <a:rPr lang="en-US" smtClean="0"/>
               <a:pPr/>
-              <a:t>2/15/25</a:t>
+              <a:t>2/23/25</a:t>
             </a:fld>
             <a:endParaRPr lang="en-US"/>
           </a:p>
@@ -4297,7 +4297,7 @@
             <a:fld id="{1D8BD707-D9CF-40AE-B4C6-C98DA3205C09}" type="datetimeFigureOut">
               <a:rPr lang="en-US" smtClean="0"/>
               <a:pPr/>
-              <a:t>2/15/25</a:t>
+              <a:t>2/23/25</a:t>
             </a:fld>
             <a:endParaRPr lang="en-US"/>
           </a:p>
@@ -4389,7 +4389,7 @@
             <a:fld id="{1D8BD707-D9CF-40AE-B4C6-C98DA3205C09}" type="datetimeFigureOut">
               <a:rPr lang="en-US" smtClean="0"/>
               <a:pPr/>
-              <a:t>2/15/25</a:t>
+              <a:t>2/23/25</a:t>
             </a:fld>
             <a:endParaRPr lang="en-US"/>
           </a:p>
@@ -4661,7 +4661,7 @@
             <a:fld id="{1D8BD707-D9CF-40AE-B4C6-C98DA3205C09}" type="datetimeFigureOut">
               <a:rPr lang="en-US" smtClean="0"/>
               <a:pPr/>
-              <a:t>2/15/25</a:t>
+              <a:t>2/23/25</a:t>
             </a:fld>
             <a:endParaRPr lang="en-US"/>
           </a:p>
@@ -4910,7 +4910,7 @@
             <a:fld id="{1D8BD707-D9CF-40AE-B4C6-C98DA3205C09}" type="datetimeFigureOut">
               <a:rPr lang="en-US" smtClean="0"/>
               <a:pPr/>
-              <a:t>2/15/25</a:t>
+              <a:t>2/23/25</a:t>
             </a:fld>
             <a:endParaRPr lang="en-US"/>
           </a:p>
@@ -5118,7 +5118,7 @@
             <a:fld id="{1D8BD707-D9CF-40AE-B4C6-C98DA3205C09}" type="datetimeFigureOut">
               <a:rPr lang="en-US" smtClean="0"/>
               <a:pPr/>
-              <a:t>2/15/25</a:t>
+              <a:t>2/23/25</a:t>
             </a:fld>
             <a:endParaRPr lang="en-US"/>
           </a:p>
@@ -5645,9 +5645,6 @@
             </a:pPr>
             <a:r>
               <a:rPr lang="en-US" sz="5400">
-                <a:solidFill>
-                  <a:srgbClr val="6E4823"/>
-                </a:solidFill>
                 <a:latin typeface="Unna"/>
                 <a:ea typeface="Unna"/>
                 <a:cs typeface="Unna"/>
@@ -5656,9 +5653,6 @@
               <a:t>       Smart Billing and Customer Services At Store</a:t>
             </a:r>
             <a:endParaRPr lang="en-US" sz="5400" dirty="0">
-              <a:solidFill>
-                <a:srgbClr val="6E4823"/>
-              </a:solidFill>
               <a:latin typeface="Unna"/>
               <a:ea typeface="Unna"/>
               <a:cs typeface="Unna"/>
@@ -5865,9 +5859,6 @@
             </a:pPr>
             <a:r>
               <a:rPr lang="en-US" dirty="0">
-                <a:solidFill>
-                  <a:srgbClr val="6E4823"/>
-                </a:solidFill>
                 <a:latin typeface="Unna"/>
                 <a:sym typeface="Unna"/>
               </a:rPr>
@@ -5879,9 +5870,6 @@
             </a:r>
             <a:r>
               <a:rPr lang="en-US" dirty="0">
-                <a:solidFill>
-                  <a:srgbClr val="6E4823"/>
-                </a:solidFill>
                 <a:latin typeface="Unna"/>
                 <a:ea typeface="Unna"/>
                 <a:cs typeface="Unna"/>
@@ -5952,45 +5940,63 @@
             <a:r>
               <a:rPr lang="en-US" sz="4000" dirty="0">
                 <a:solidFill>
-                  <a:srgbClr val="6E4823"/>
+                  <a:schemeClr val="tx1"/>
                 </a:solidFill>
                 <a:latin typeface="Unna"/>
                 <a:ea typeface="Unna"/>
                 <a:cs typeface="Unna"/>
                 <a:sym typeface="Unna"/>
               </a:rPr>
-              <a:t>Name:    SHAH ISHAN RAJUBHAI</a:t>
+              <a:t>Name:     SHAH ISHAN RAJUBHAI</a:t>
             </a:r>
-          </a:p>
-          <a:p>
-            <a:pPr lvl="1"/>
-            <a:endParaRPr lang="en-US" sz="4000" dirty="0">
-              <a:solidFill>
-                <a:srgbClr val="6E4823"/>
-              </a:solidFill>
-              <a:latin typeface="Unna"/>
-              <a:ea typeface="Unna"/>
-              <a:cs typeface="Unna"/>
-              <a:sym typeface="Unna"/>
-            </a:endParaRPr>
           </a:p>
           <a:p>
             <a:pPr lvl="1"/>
             <a:r>
               <a:rPr lang="en-US" sz="4000" spc="-43" dirty="0">
                 <a:solidFill>
-                  <a:srgbClr val="6E4823"/>
+                  <a:schemeClr val="tx1"/>
                 </a:solidFill>
                 <a:latin typeface="Unna"/>
                 <a:ea typeface="Fraunces"/>
                 <a:cs typeface="Fraunces"/>
                 <a:sym typeface="Unna"/>
               </a:rPr>
-              <a:t>Enr No:   23002171310152</a:t>
+              <a:t>Enr No:    23002171310152</a:t>
+            </a:r>
+          </a:p>
+          <a:p>
+            <a:pPr lvl="1"/>
+            <a:r>
+              <a:rPr lang="en-US" sz="4000" spc="-43" dirty="0">
+                <a:solidFill>
+                  <a:schemeClr val="tx1"/>
+                </a:solidFill>
+                <a:latin typeface="Unna"/>
+                <a:ea typeface="Fraunces"/>
+                <a:cs typeface="Fraunces"/>
+                <a:sym typeface="Unna"/>
+              </a:rPr>
+              <a:t>Batch:      D2</a:t>
+            </a:r>
+          </a:p>
+          <a:p>
+            <a:pPr lvl="1"/>
+            <a:r>
+              <a:rPr lang="en-US" sz="4000" spc="-43" dirty="0">
+                <a:solidFill>
+                  <a:schemeClr val="tx1"/>
+                </a:solidFill>
+                <a:latin typeface="Unna"/>
+                <a:ea typeface="Fraunces"/>
+                <a:cs typeface="Fraunces"/>
+                <a:sym typeface="Unna"/>
+              </a:rPr>
+              <a:t>Roll No:   67</a:t>
             </a:r>
             <a:endParaRPr lang="en-US" sz="3900" spc="-43" dirty="0">
               <a:solidFill>
-                <a:srgbClr val="272525"/>
+                <a:schemeClr val="tx1"/>
               </a:solidFill>
               <a:latin typeface="Fraunces"/>
               <a:ea typeface="Fraunces"/>
@@ -6146,9 +6152,6 @@
               </a:pPr>
               <a:r>
                 <a:rPr lang="en-US" sz="5400" b="1" dirty="0">
-                  <a:solidFill>
-                    <a:srgbClr val="6E4823"/>
-                  </a:solidFill>
                   <a:latin typeface="Unna Bold"/>
                   <a:ea typeface="Unna Bold"/>
                   <a:cs typeface="Unna Bold"/>
@@ -6270,9 +6273,6 @@
               </a:pPr>
               <a:r>
                 <a:rPr lang="en-US" sz="2687" dirty="0">
-                  <a:solidFill>
-                    <a:srgbClr val="6E4823"/>
-                  </a:solidFill>
                   <a:latin typeface="Unna"/>
                   <a:ea typeface="Unna"/>
                   <a:cs typeface="Unna"/>
@@ -6282,9 +6282,6 @@
               </a:r>
               <a:r>
                 <a:rPr lang="en-US" sz="2687" b="1" dirty="0">
-                  <a:solidFill>
-                    <a:srgbClr val="6E4823"/>
-                  </a:solidFill>
                   <a:latin typeface="Unna"/>
                   <a:ea typeface="Unna"/>
                   <a:cs typeface="Unna"/>
@@ -6294,9 +6291,6 @@
               </a:r>
               <a:r>
                 <a:rPr lang="en-US" sz="2687" dirty="0">
-                  <a:solidFill>
-                    <a:srgbClr val="6E4823"/>
-                  </a:solidFill>
                   <a:latin typeface="Unna"/>
                   <a:ea typeface="Unna"/>
                   <a:cs typeface="Unna"/>
@@ -6313,9 +6307,6 @@
               </a:pPr>
               <a:r>
                 <a:rPr lang="en-US" sz="2687" dirty="0">
-                  <a:solidFill>
-                    <a:srgbClr val="6E4823"/>
-                  </a:solidFill>
                   <a:latin typeface="Unna"/>
                   <a:ea typeface="Unna"/>
                   <a:cs typeface="Unna"/>
@@ -6687,9 +6678,6 @@
               </a:pPr>
               <a:r>
                 <a:rPr lang="en-US" sz="3250" dirty="0">
-                  <a:solidFill>
-                    <a:srgbClr val="6E4823"/>
-                  </a:solidFill>
                   <a:latin typeface="Unna"/>
                   <a:ea typeface="Unna"/>
                   <a:cs typeface="Unna"/>
@@ -6808,9 +6796,6 @@
               </a:pPr>
               <a:r>
                 <a:rPr lang="en-US" sz="2687" dirty="0">
-                  <a:solidFill>
-                    <a:srgbClr val="6E4823"/>
-                  </a:solidFill>
                   <a:latin typeface="Unna"/>
                   <a:ea typeface="Unna"/>
                   <a:cs typeface="Unna"/>
@@ -6929,9 +6914,6 @@
               </a:pPr>
               <a:r>
                 <a:rPr lang="en-US" sz="2062" dirty="0">
-                  <a:solidFill>
-                    <a:srgbClr val="6E4823"/>
-                  </a:solidFill>
                   <a:latin typeface="Unna"/>
                   <a:ea typeface="Unna"/>
                   <a:cs typeface="Unna"/>
@@ -7303,9 +7285,6 @@
               </a:pPr>
               <a:r>
                 <a:rPr lang="en-US" sz="3250" dirty="0">
-                  <a:solidFill>
-                    <a:srgbClr val="6E4823"/>
-                  </a:solidFill>
                   <a:latin typeface="Unna"/>
                   <a:ea typeface="Unna"/>
                   <a:cs typeface="Unna"/>
@@ -7424,9 +7403,6 @@
               </a:pPr>
               <a:r>
                 <a:rPr lang="en-US" sz="2687" dirty="0">
-                  <a:solidFill>
-                    <a:srgbClr val="6E4823"/>
-                  </a:solidFill>
                   <a:latin typeface="Unna"/>
                   <a:ea typeface="Unna"/>
                   <a:cs typeface="Unna"/>
@@ -7545,9 +7521,6 @@
               </a:pPr>
               <a:r>
                 <a:rPr lang="en-US" sz="2062" dirty="0">
-                  <a:solidFill>
-                    <a:srgbClr val="6E4823"/>
-                  </a:solidFill>
                   <a:latin typeface="Unna"/>
                   <a:ea typeface="Unna"/>
                   <a:cs typeface="Unna"/>
@@ -7919,9 +7892,6 @@
               </a:pPr>
               <a:r>
                 <a:rPr lang="en-US" sz="3250" dirty="0">
-                  <a:solidFill>
-                    <a:srgbClr val="6E4823"/>
-                  </a:solidFill>
                   <a:latin typeface="Unna"/>
                   <a:ea typeface="Unna"/>
                   <a:cs typeface="Unna"/>
@@ -8040,9 +8010,6 @@
               </a:pPr>
               <a:r>
                 <a:rPr lang="en-US" sz="2687" dirty="0">
-                  <a:solidFill>
-                    <a:srgbClr val="6E4823"/>
-                  </a:solidFill>
                   <a:latin typeface="Unna"/>
                   <a:ea typeface="Unna"/>
                   <a:cs typeface="Unna"/>
@@ -8161,9 +8128,6 @@
               </a:pPr>
               <a:r>
                 <a:rPr lang="en-US" sz="2062" dirty="0">
-                  <a:solidFill>
-                    <a:srgbClr val="6E4823"/>
-                  </a:solidFill>
                   <a:latin typeface="Unna"/>
                   <a:ea typeface="Unna"/>
                   <a:cs typeface="Unna"/>
@@ -8282,9 +8246,6 @@
               </a:pPr>
               <a:r>
                 <a:rPr lang="en-US" sz="2062" dirty="0">
-                  <a:solidFill>
-                    <a:srgbClr val="6E4823"/>
-                  </a:solidFill>
                   <a:latin typeface="Unna"/>
                   <a:ea typeface="Unna"/>
                   <a:cs typeface="Unna"/>
@@ -8431,9 +8392,6 @@
             </a:pPr>
             <a:r>
               <a:rPr lang="en-US" sz="5400" dirty="0">
-                <a:solidFill>
-                  <a:srgbClr val="6E4823"/>
-                </a:solidFill>
                 <a:latin typeface="Unna"/>
                 <a:ea typeface="Unna"/>
                 <a:cs typeface="Unna"/>
@@ -8695,9 +8653,6 @@
             </a:pPr>
             <a:r>
               <a:rPr lang="en-US" sz="5400" dirty="0">
-                <a:solidFill>
-                  <a:srgbClr val="6E4823"/>
-                </a:solidFill>
                 <a:latin typeface="Unna"/>
                 <a:ea typeface="Unna"/>
                 <a:cs typeface="Unna"/>
@@ -8879,9 +8834,6 @@
               </a:pPr>
               <a:r>
                 <a:rPr lang="en-US" sz="5400" b="1" dirty="0">
-                  <a:solidFill>
-                    <a:srgbClr val="6E4823"/>
-                  </a:solidFill>
                   <a:latin typeface="Unna Bold"/>
                   <a:ea typeface="Unna Bold"/>
                   <a:cs typeface="Unna Bold"/>
@@ -9035,9 +8987,6 @@
               </a:pPr>
               <a:r>
                 <a:rPr lang="en-US" sz="2349" dirty="0">
-                  <a:solidFill>
-                    <a:srgbClr val="6E4823"/>
-                  </a:solidFill>
                   <a:latin typeface="Unna"/>
                   <a:ea typeface="Unna"/>
                   <a:cs typeface="Unna"/>
@@ -9138,9 +9087,6 @@
               </a:pPr>
               <a:r>
                 <a:rPr lang="en-US" sz="1912" dirty="0">
-                  <a:solidFill>
-                    <a:srgbClr val="6E4823"/>
-                  </a:solidFill>
                   <a:latin typeface="Unna"/>
                   <a:ea typeface="Unna"/>
                   <a:cs typeface="Unna"/>
@@ -9294,9 +9240,6 @@
               </a:pPr>
               <a:r>
                 <a:rPr lang="en-US" sz="2349" dirty="0">
-                  <a:solidFill>
-                    <a:srgbClr val="6E4823"/>
-                  </a:solidFill>
                   <a:latin typeface="Unna"/>
                   <a:ea typeface="Unna"/>
                   <a:cs typeface="Unna"/>
@@ -9397,9 +9340,6 @@
               </a:pPr>
               <a:r>
                 <a:rPr lang="en-US" sz="1912" dirty="0">
-                  <a:solidFill>
-                    <a:srgbClr val="6E4823"/>
-                  </a:solidFill>
                   <a:latin typeface="Unna"/>
                   <a:ea typeface="Unna"/>
                   <a:cs typeface="Unna"/>
@@ -9553,9 +9493,6 @@
               </a:pPr>
               <a:r>
                 <a:rPr lang="en-US" sz="2349" dirty="0">
-                  <a:solidFill>
-                    <a:srgbClr val="6E4823"/>
-                  </a:solidFill>
                   <a:latin typeface="Unna"/>
                   <a:ea typeface="Unna"/>
                   <a:cs typeface="Unna"/>
@@ -9656,9 +9593,6 @@
               </a:pPr>
               <a:r>
                 <a:rPr lang="en-US" sz="1912" dirty="0">
-                  <a:solidFill>
-                    <a:srgbClr val="6E4823"/>
-                  </a:solidFill>
                   <a:latin typeface="Unna"/>
                   <a:ea typeface="Unna"/>
                   <a:cs typeface="Unna"/>
@@ -9812,9 +9746,6 @@
               </a:pPr>
               <a:r>
                 <a:rPr lang="en-US" sz="2349" dirty="0">
-                  <a:solidFill>
-                    <a:srgbClr val="6E4823"/>
-                  </a:solidFill>
                   <a:latin typeface="Unna"/>
                   <a:ea typeface="Unna"/>
                   <a:cs typeface="Unna"/>
@@ -9915,9 +9846,6 @@
               </a:pPr>
               <a:r>
                 <a:rPr lang="en-US" sz="1912" dirty="0">
-                  <a:solidFill>
-                    <a:srgbClr val="6E4823"/>
-                  </a:solidFill>
                   <a:latin typeface="Unna"/>
                   <a:ea typeface="Unna"/>
                   <a:cs typeface="Unna"/>
@@ -10071,9 +9999,6 @@
               </a:pPr>
               <a:r>
                 <a:rPr lang="en-US" sz="2349" dirty="0">
-                  <a:solidFill>
-                    <a:srgbClr val="6E4823"/>
-                  </a:solidFill>
                   <a:latin typeface="Unna"/>
                   <a:ea typeface="Unna"/>
                   <a:cs typeface="Unna"/>
@@ -10174,9 +10099,6 @@
               </a:pPr>
               <a:r>
                 <a:rPr lang="en-US" sz="1912" dirty="0">
-                  <a:solidFill>
-                    <a:srgbClr val="6E4823"/>
-                  </a:solidFill>
                   <a:latin typeface="Unna"/>
                   <a:ea typeface="Unna"/>
                   <a:cs typeface="Unna"/>
@@ -10330,9 +10252,6 @@
               </a:pPr>
               <a:r>
                 <a:rPr lang="en-US" sz="2349" dirty="0">
-                  <a:solidFill>
-                    <a:srgbClr val="6E4823"/>
-                  </a:solidFill>
                   <a:latin typeface="Unna"/>
                   <a:ea typeface="Unna"/>
                   <a:cs typeface="Unna"/>
@@ -10433,9 +10352,6 @@
               </a:pPr>
               <a:r>
                 <a:rPr lang="en-US" sz="1912" dirty="0">
-                  <a:solidFill>
-                    <a:srgbClr val="6E4823"/>
-                  </a:solidFill>
                   <a:latin typeface="Unna"/>
                   <a:ea typeface="Unna"/>
                   <a:cs typeface="Unna"/>
@@ -10589,9 +10505,6 @@
               </a:pPr>
               <a:r>
                 <a:rPr lang="en-US" sz="2349" dirty="0">
-                  <a:solidFill>
-                    <a:srgbClr val="6E4823"/>
-                  </a:solidFill>
                   <a:latin typeface="Unna"/>
                   <a:ea typeface="Unna"/>
                   <a:cs typeface="Unna"/>
@@ -10692,9 +10605,6 @@
               </a:pPr>
               <a:r>
                 <a:rPr lang="en-US" sz="1912" dirty="0">
-                  <a:solidFill>
-                    <a:srgbClr val="6E4823"/>
-                  </a:solidFill>
                   <a:latin typeface="Unna"/>
                   <a:ea typeface="Unna"/>
                   <a:cs typeface="Unna"/>
@@ -10848,9 +10758,6 @@
               </a:pPr>
               <a:r>
                 <a:rPr lang="en-US" sz="2349" dirty="0">
-                  <a:solidFill>
-                    <a:srgbClr val="6E4823"/>
-                  </a:solidFill>
                   <a:latin typeface="Unna"/>
                   <a:ea typeface="Unna"/>
                   <a:cs typeface="Unna"/>
@@ -10951,9 +10858,6 @@
               </a:pPr>
               <a:r>
                 <a:rPr lang="en-US" sz="1912" dirty="0">
-                  <a:solidFill>
-                    <a:srgbClr val="6E4823"/>
-                  </a:solidFill>
                   <a:latin typeface="Unna"/>
                   <a:ea typeface="Unna"/>
                   <a:cs typeface="Unna"/>
@@ -11107,9 +11011,6 @@
               </a:pPr>
               <a:r>
                 <a:rPr lang="en-US" sz="2349" dirty="0">
-                  <a:solidFill>
-                    <a:srgbClr val="6E4823"/>
-                  </a:solidFill>
                   <a:latin typeface="Unna"/>
                   <a:ea typeface="Unna"/>
                   <a:cs typeface="Unna"/>
@@ -11210,9 +11111,6 @@
               </a:pPr>
               <a:r>
                 <a:rPr lang="en-US" sz="1912" dirty="0">
-                  <a:solidFill>
-                    <a:srgbClr val="6E4823"/>
-                  </a:solidFill>
                   <a:latin typeface="Unna"/>
                   <a:ea typeface="Unna"/>
                   <a:cs typeface="Unna"/>
@@ -11229,9 +11127,6 @@
               </a:pPr>
               <a:r>
                 <a:rPr lang="en-US" sz="1912" dirty="0">
-                  <a:solidFill>
-                    <a:srgbClr val="6E4823"/>
-                  </a:solidFill>
                   <a:latin typeface="Unna"/>
                   <a:ea typeface="Unna"/>
                   <a:cs typeface="Unna"/>
@@ -11436,9 +11331,6 @@
               </a:pPr>
               <a:r>
                 <a:rPr lang="en-US" sz="5400" b="1" dirty="0">
-                  <a:solidFill>
-                    <a:srgbClr val="6E4823"/>
-                  </a:solidFill>
                   <a:latin typeface="Unna Bold"/>
                   <a:ea typeface="Unna Bold"/>
                   <a:cs typeface="Unna Bold"/>
@@ -11539,9 +11431,6 @@
               </a:pPr>
               <a:r>
                 <a:rPr lang="en-US" sz="2437" dirty="0">
-                  <a:solidFill>
-                    <a:srgbClr val="6E4823"/>
-                  </a:solidFill>
                   <a:latin typeface="Unna"/>
                   <a:ea typeface="Unna"/>
                   <a:cs typeface="Unna"/>
@@ -11642,9 +11531,6 @@
               </a:pPr>
               <a:r>
                 <a:rPr lang="en-US" sz="1937" dirty="0">
-                  <a:solidFill>
-                    <a:srgbClr val="6E4823"/>
-                  </a:solidFill>
                   <a:latin typeface="Unna"/>
                   <a:ea typeface="Unna"/>
                   <a:cs typeface="Unna"/>
@@ -11745,9 +11631,6 @@
               </a:pPr>
               <a:r>
                 <a:rPr lang="en-US" sz="2437" dirty="0">
-                  <a:solidFill>
-                    <a:srgbClr val="6E4823"/>
-                  </a:solidFill>
                   <a:latin typeface="Unna"/>
                   <a:ea typeface="Unna"/>
                   <a:cs typeface="Unna"/>
@@ -11850,9 +11733,6 @@
               </a:pPr>
               <a:r>
                 <a:rPr lang="en-US" sz="1937" dirty="0">
-                  <a:solidFill>
-                    <a:srgbClr val="6E4823"/>
-                  </a:solidFill>
                   <a:latin typeface="Unna"/>
                   <a:ea typeface="Unna"/>
                   <a:cs typeface="Unna"/>
@@ -11955,9 +11835,6 @@
               </a:pPr>
               <a:r>
                 <a:rPr lang="en-US" sz="1937" dirty="0">
-                  <a:solidFill>
-                    <a:srgbClr val="6E4823"/>
-                  </a:solidFill>
                   <a:latin typeface="Unna"/>
                   <a:ea typeface="Unna"/>
                   <a:cs typeface="Unna"/>
@@ -12060,9 +11937,6 @@
               </a:pPr>
               <a:r>
                 <a:rPr lang="en-US" sz="1937" dirty="0">
-                  <a:solidFill>
-                    <a:srgbClr val="6E4823"/>
-                  </a:solidFill>
                   <a:latin typeface="Unna"/>
                   <a:ea typeface="Unna"/>
                   <a:cs typeface="Unna"/>
@@ -12163,9 +12037,6 @@
               </a:pPr>
               <a:r>
                 <a:rPr lang="en-US" sz="2437" dirty="0">
-                  <a:solidFill>
-                    <a:srgbClr val="6E4823"/>
-                  </a:solidFill>
                   <a:latin typeface="Unna"/>
                   <a:ea typeface="Unna"/>
                   <a:cs typeface="Unna"/>
@@ -12266,9 +12137,6 @@
               </a:pPr>
               <a:r>
                 <a:rPr lang="en-US" sz="1937" dirty="0">
-                  <a:solidFill>
-                    <a:srgbClr val="6E4823"/>
-                  </a:solidFill>
                   <a:latin typeface="Unna"/>
                   <a:ea typeface="Unna"/>
                   <a:cs typeface="Unna"/>
@@ -12369,9 +12237,6 @@
               </a:pPr>
               <a:r>
                 <a:rPr lang="en-US" sz="2437" dirty="0">
-                  <a:solidFill>
-                    <a:srgbClr val="6E4823"/>
-                  </a:solidFill>
                   <a:latin typeface="Unna"/>
                   <a:ea typeface="Unna"/>
                   <a:cs typeface="Unna"/>
@@ -12472,9 +12337,6 @@
               </a:pPr>
               <a:r>
                 <a:rPr lang="en-US" sz="1937" dirty="0">
-                  <a:solidFill>
-                    <a:srgbClr val="6E4823"/>
-                  </a:solidFill>
                   <a:latin typeface="Unna"/>
                   <a:ea typeface="Unna"/>
                   <a:cs typeface="Unna"/>
@@ -12575,9 +12437,6 @@
               </a:pPr>
               <a:r>
                 <a:rPr lang="en-US" sz="2437" dirty="0">
-                  <a:solidFill>
-                    <a:srgbClr val="6E4823"/>
-                  </a:solidFill>
                   <a:latin typeface="Unna"/>
                   <a:ea typeface="Unna"/>
                   <a:cs typeface="Unna"/>
@@ -12678,9 +12537,6 @@
               </a:pPr>
               <a:r>
                 <a:rPr lang="en-US" sz="1937" dirty="0">
-                  <a:solidFill>
-                    <a:srgbClr val="6E4823"/>
-                  </a:solidFill>
                   <a:latin typeface="Unna"/>
                   <a:ea typeface="Unna"/>
                   <a:cs typeface="Unna"/>
@@ -12781,9 +12637,6 @@
               </a:pPr>
               <a:r>
                 <a:rPr lang="en-US" sz="2437" dirty="0">
-                  <a:solidFill>
-                    <a:srgbClr val="6E4823"/>
-                  </a:solidFill>
                   <a:latin typeface="Unna"/>
                   <a:ea typeface="Unna"/>
                   <a:cs typeface="Unna"/>
@@ -12884,9 +12737,6 @@
               </a:pPr>
               <a:r>
                 <a:rPr lang="en-US" sz="1937" dirty="0">
-                  <a:solidFill>
-                    <a:srgbClr val="6E4823"/>
-                  </a:solidFill>
                   <a:latin typeface="Unna"/>
                   <a:ea typeface="Unna"/>
                   <a:cs typeface="Unna"/>
@@ -12987,9 +12837,6 @@
               </a:pPr>
               <a:r>
                 <a:rPr lang="en-US" sz="2437" dirty="0">
-                  <a:solidFill>
-                    <a:srgbClr val="6E4823"/>
-                  </a:solidFill>
                   <a:latin typeface="Unna"/>
                   <a:ea typeface="Unna"/>
                   <a:cs typeface="Unna"/>
@@ -13090,9 +12937,6 @@
               </a:pPr>
               <a:r>
                 <a:rPr lang="en-US" sz="1937" dirty="0">
-                  <a:solidFill>
-                    <a:srgbClr val="6E4823"/>
-                  </a:solidFill>
                   <a:latin typeface="Unna"/>
                   <a:ea typeface="Unna"/>
                   <a:cs typeface="Unna"/>
@@ -13193,9 +13037,6 @@
               </a:pPr>
               <a:r>
                 <a:rPr lang="en-US" sz="1937" dirty="0">
-                  <a:solidFill>
-                    <a:srgbClr val="6E4823"/>
-                  </a:solidFill>
                   <a:latin typeface="Unna"/>
                   <a:ea typeface="Unna"/>
                   <a:cs typeface="Unna"/>
@@ -13296,9 +13137,6 @@
               </a:pPr>
               <a:r>
                 <a:rPr lang="en-US" sz="1937" dirty="0">
-                  <a:solidFill>
-                    <a:srgbClr val="6E4823"/>
-                  </a:solidFill>
                   <a:latin typeface="Unna"/>
                   <a:ea typeface="Unna"/>
                   <a:cs typeface="Unna"/>
@@ -13399,9 +13237,6 @@
               </a:pPr>
               <a:r>
                 <a:rPr lang="en-US" sz="1937" dirty="0">
-                  <a:solidFill>
-                    <a:srgbClr val="6E4823"/>
-                  </a:solidFill>
                   <a:latin typeface="Unna"/>
                   <a:ea typeface="Unna"/>
                   <a:cs typeface="Unna"/>
@@ -13606,9 +13441,6 @@
               </a:pPr>
               <a:r>
                 <a:rPr lang="en-US" sz="5400" b="1" dirty="0">
-                  <a:solidFill>
-                    <a:srgbClr val="6E4823"/>
-                  </a:solidFill>
                   <a:latin typeface="Unna Bold"/>
                   <a:ea typeface="Unna Bold"/>
                   <a:cs typeface="Unna Bold"/>
@@ -13711,9 +13543,6 @@
               </a:pPr>
               <a:r>
                 <a:rPr lang="en-US" sz="2687" dirty="0">
-                  <a:solidFill>
-                    <a:srgbClr val="6E4823"/>
-                  </a:solidFill>
                   <a:latin typeface="Unna"/>
                   <a:ea typeface="Unna"/>
                   <a:cs typeface="Unna"/>
@@ -13723,9 +13552,6 @@
               </a:r>
               <a:r>
                 <a:rPr lang="en-US" sz="2687" b="1" dirty="0">
-                  <a:solidFill>
-                    <a:srgbClr val="6E4823"/>
-                  </a:solidFill>
                   <a:latin typeface="Unna Bold"/>
                   <a:ea typeface="Unna Bold"/>
                   <a:cs typeface="Unna Bold"/>
@@ -13828,9 +13654,6 @@
               </a:pPr>
               <a:r>
                 <a:rPr lang="en-US" sz="2687" dirty="0">
-                  <a:solidFill>
-                    <a:srgbClr val="6E4823"/>
-                  </a:solidFill>
                   <a:latin typeface="Unna"/>
                   <a:ea typeface="Unna"/>
                   <a:cs typeface="Unna"/>
@@ -13840,9 +13663,6 @@
               </a:r>
               <a:r>
                 <a:rPr lang="en-US" sz="2687" b="1" dirty="0">
-                  <a:solidFill>
-                    <a:srgbClr val="6E4823"/>
-                  </a:solidFill>
                   <a:latin typeface="Unna Bold"/>
                   <a:ea typeface="Unna Bold"/>
                   <a:cs typeface="Unna Bold"/>
@@ -13945,9 +13765,6 @@
               </a:pPr>
               <a:r>
                 <a:rPr lang="en-US" sz="2687" dirty="0">
-                  <a:solidFill>
-                    <a:srgbClr val="6E4823"/>
-                  </a:solidFill>
                   <a:latin typeface="Unna"/>
                   <a:ea typeface="Unna"/>
                   <a:cs typeface="Unna"/>
@@ -13957,9 +13774,6 @@
               </a:r>
               <a:r>
                 <a:rPr lang="en-US" sz="2687" b="1" dirty="0">
-                  <a:solidFill>
-                    <a:srgbClr val="6E4823"/>
-                  </a:solidFill>
                   <a:latin typeface="Unna Bold"/>
                   <a:ea typeface="Unna Bold"/>
                   <a:cs typeface="Unna Bold"/>
@@ -13969,9 +13783,6 @@
               </a:r>
               <a:r>
                 <a:rPr lang="en-US" sz="2687" dirty="0">
-                  <a:solidFill>
-                    <a:srgbClr val="6E4823"/>
-                  </a:solidFill>
                   <a:latin typeface="Unna"/>
                   <a:ea typeface="Unna"/>
                   <a:cs typeface="Unna"/>
@@ -14073,10 +13884,7 @@
                 <a:buChar char="•"/>
               </a:pPr>
               <a:r>
-                <a:rPr lang="en-US" sz="2687">
-                  <a:solidFill>
-                    <a:srgbClr val="6E4823"/>
-                  </a:solidFill>
+                <a:rPr lang="en-US" sz="2687" dirty="0">
                   <a:latin typeface="Unna"/>
                   <a:ea typeface="Unna"/>
                   <a:cs typeface="Unna"/>
@@ -14085,22 +13893,16 @@
                 <a:t>Libraries Used: </a:t>
               </a:r>
               <a:r>
-                <a:rPr lang="en-US" sz="2687" b="1">
-                  <a:solidFill>
-                    <a:srgbClr val="6E4823"/>
-                  </a:solidFill>
+                <a:rPr lang="en-US" sz="2687" b="1" dirty="0">
                   <a:latin typeface="Unna Bold"/>
                   <a:ea typeface="Unna Bold"/>
                   <a:cs typeface="Unna Bold"/>
                   <a:sym typeface="Unna Bold"/>
                 </a:rPr>
-                <a:t>Matplotlib, Tkinter </a:t>
+                <a:t>Matplotlib, Twilio </a:t>
               </a:r>
               <a:r>
-                <a:rPr lang="en-US" sz="2687">
-                  <a:solidFill>
-                    <a:srgbClr val="6E4823"/>
-                  </a:solidFill>
+                <a:rPr lang="en-US" sz="2687" dirty="0">
                   <a:latin typeface="Unna"/>
                   <a:ea typeface="Unna"/>
                   <a:cs typeface="Unna"/>
@@ -14109,10 +13911,7 @@
                 <a:t>(for messages)</a:t>
               </a:r>
               <a:r>
-                <a:rPr lang="en-US" sz="2687" b="1">
-                  <a:solidFill>
-                    <a:srgbClr val="6E4823"/>
-                  </a:solidFill>
+                <a:rPr lang="en-US" sz="2687" b="1" dirty="0">
                   <a:latin typeface="Unna Bold"/>
                   <a:ea typeface="Unna Bold"/>
                   <a:cs typeface="Unna Bold"/>
@@ -14317,9 +14116,6 @@
               </a:pPr>
               <a:r>
                 <a:rPr lang="en-US" sz="5400" b="1" dirty="0">
-                  <a:solidFill>
-                    <a:srgbClr val="6E4823"/>
-                  </a:solidFill>
                   <a:latin typeface="Unna Bold"/>
                   <a:ea typeface="Unna Bold"/>
                   <a:cs typeface="Unna Bold"/>
@@ -14492,9 +14288,6 @@
               </a:pPr>
               <a:r>
                 <a:rPr lang="en-US" sz="2862">
-                  <a:solidFill>
-                    <a:srgbClr val="6E4823"/>
-                  </a:solidFill>
                   <a:latin typeface="Unna"/>
                   <a:ea typeface="Unna"/>
                   <a:cs typeface="Unna"/>
@@ -14595,9 +14388,6 @@
               </a:pPr>
               <a:r>
                 <a:rPr lang="en-US" sz="2237">
-                  <a:solidFill>
-                    <a:srgbClr val="6E4823"/>
-                  </a:solidFill>
                   <a:latin typeface="Unna"/>
                   <a:ea typeface="Unna"/>
                   <a:cs typeface="Unna"/>
@@ -14759,9 +14549,6 @@
               </a:pPr>
               <a:r>
                 <a:rPr lang="en-US" sz="2862">
-                  <a:solidFill>
-                    <a:srgbClr val="6E4823"/>
-                  </a:solidFill>
                   <a:latin typeface="Unna"/>
                   <a:ea typeface="Unna"/>
                   <a:cs typeface="Unna"/>
@@ -14862,9 +14649,6 @@
               </a:pPr>
               <a:r>
                 <a:rPr lang="en-US" sz="2237">
-                  <a:solidFill>
-                    <a:srgbClr val="6E4823"/>
-                  </a:solidFill>
                   <a:latin typeface="Unna"/>
                   <a:ea typeface="Unna"/>
                   <a:cs typeface="Unna"/>
@@ -15026,9 +14810,6 @@
               </a:pPr>
               <a:r>
                 <a:rPr lang="en-US" sz="2862">
-                  <a:solidFill>
-                    <a:srgbClr val="6E4823"/>
-                  </a:solidFill>
                   <a:latin typeface="Unna"/>
                   <a:ea typeface="Unna"/>
                   <a:cs typeface="Unna"/>
@@ -15129,9 +14910,6 @@
               </a:pPr>
               <a:r>
                 <a:rPr lang="en-US" sz="2237">
-                  <a:solidFill>
-                    <a:srgbClr val="6E4823"/>
-                  </a:solidFill>
                   <a:latin typeface="Unna"/>
                   <a:ea typeface="Unna"/>
                   <a:cs typeface="Unna"/>
@@ -15293,9 +15071,6 @@
               </a:pPr>
               <a:r>
                 <a:rPr lang="en-US" sz="2862">
-                  <a:solidFill>
-                    <a:srgbClr val="6E4823"/>
-                  </a:solidFill>
                   <a:latin typeface="Unna"/>
                   <a:ea typeface="Unna"/>
                   <a:cs typeface="Unna"/>
@@ -15396,9 +15171,6 @@
               </a:pPr>
               <a:r>
                 <a:rPr lang="en-US" sz="2237">
-                  <a:solidFill>
-                    <a:srgbClr val="6E4823"/>
-                  </a:solidFill>
                   <a:latin typeface="Unna"/>
                   <a:ea typeface="Unna"/>
                   <a:cs typeface="Unna"/>
@@ -15560,9 +15332,6 @@
               </a:pPr>
               <a:r>
                 <a:rPr lang="en-US" sz="2862">
-                  <a:solidFill>
-                    <a:srgbClr val="6E4823"/>
-                  </a:solidFill>
                   <a:latin typeface="Unna"/>
                   <a:ea typeface="Unna"/>
                   <a:cs typeface="Unna"/>
@@ -15663,9 +15432,6 @@
               </a:pPr>
               <a:r>
                 <a:rPr lang="en-US" sz="2237">
-                  <a:solidFill>
-                    <a:srgbClr val="6E4823"/>
-                  </a:solidFill>
                   <a:latin typeface="Unna"/>
                   <a:ea typeface="Unna"/>
                   <a:cs typeface="Unna"/>
@@ -15826,16 +15592,13 @@
                 </a:lnSpc>
               </a:pPr>
               <a:r>
-                <a:rPr lang="en-US" sz="2862">
-                  <a:solidFill>
-                    <a:srgbClr val="6E4823"/>
-                  </a:solidFill>
+                <a:rPr lang="en-US" sz="2862" dirty="0">
                   <a:latin typeface="Unna"/>
                   <a:ea typeface="Unna"/>
                   <a:cs typeface="Unna"/>
                   <a:sym typeface="Unna"/>
                 </a:rPr>
-                <a:t>Subscription &amp; Personalized Shopping Plans:</a:t>
+                <a:t>Product Unavailability :</a:t>
               </a:r>
             </a:p>
           </p:txBody>
@@ -15849,10 +15612,10 @@
         </p:nvGrpSpPr>
         <p:grpSpPr>
           <a:xfrm>
-            <a:off x="12150030" y="8340329"/>
-            <a:ext cx="5009704" cy="840261"/>
-            <a:chOff x="0" y="0"/>
-            <a:chExt cx="6679605" cy="1120348"/>
+            <a:off x="12150030" y="7857678"/>
+            <a:ext cx="5009704" cy="1322912"/>
+            <a:chOff x="0" y="-643535"/>
+            <a:chExt cx="6679605" cy="1763883"/>
           </a:xfrm>
         </p:grpSpPr>
         <p:sp>
@@ -15912,8 +15675,8 @@
           </p:nvSpPr>
           <p:spPr>
             <a:xfrm>
-              <a:off x="0" y="-95250"/>
-              <a:ext cx="6679605" cy="1215598"/>
+              <a:off x="0" y="-643535"/>
+              <a:ext cx="6679605" cy="1215599"/>
             </a:xfrm>
             <a:prstGeom prst="rect">
               <a:avLst/>
@@ -15929,16 +15692,13 @@
                 </a:lnSpc>
               </a:pPr>
               <a:r>
-                <a:rPr lang="en-US" sz="2237">
-                  <a:solidFill>
-                    <a:srgbClr val="6E4823"/>
-                  </a:solidFill>
+                <a:rPr lang="en-US" sz="2237" dirty="0">
                   <a:latin typeface="Unna"/>
                   <a:ea typeface="Unna"/>
                   <a:cs typeface="Unna"/>
                   <a:sym typeface="Unna"/>
                 </a:rPr>
-                <a:t>Customers can subscribe to essential products for automatic billing</a:t>
+                <a:t>Customers can enter unavailable product they want to database which can be later accessed by Store Manager.</a:t>
               </a:r>
             </a:p>
           </p:txBody>
@@ -16200,10 +15960,7 @@
                 </a:lnSpc>
               </a:pPr>
               <a:r>
-                <a:rPr lang="en-US" sz="5400" b="1">
-                  <a:solidFill>
-                    <a:srgbClr val="6E4823"/>
-                  </a:solidFill>
+                <a:rPr lang="en-US" sz="5400" b="1" dirty="0">
                   <a:latin typeface="Unna Bold"/>
                   <a:ea typeface="Unna Bold"/>
                   <a:cs typeface="Unna Bold"/>
@@ -16304,9 +16061,6 @@
               </a:pPr>
               <a:r>
                 <a:rPr lang="en-US" sz="2387">
-                  <a:solidFill>
-                    <a:srgbClr val="6E4823"/>
-                  </a:solidFill>
                   <a:latin typeface="Unna"/>
                   <a:ea typeface="Unna"/>
                   <a:cs typeface="Unna"/>
